--- a/public/fun/pack/pptx/familypro/가족소개프리미엄_44_나혼자·1인가구_샴페인누아르.pptx
+++ b/public/fun/pack/pptx/familypro/가족소개프리미엄_44_나혼자·1인가구_샴페인누아르.pptx
@@ -113,12 +113,12 @@
   <p:extLst>
     <p:ext uri="{521415D9-36F7-43E2-AB2F-B90AF26B5E84}">
       <p14:sectionLst xmlns:p14="http://schemas.microsoft.com/office/powerpoint/2010/main">
-        <p14:section name="시작" id="{030A516F-0455-445E-BB66-35A8895AB3FB}">
+        <p14:section name="시작" id="{A2C5D937-A128-4DE2-969B-0B7C2A4D3A56}">
           <p14:sldIdLst>
             <p14:sldId id="256"/>
           </p14:sldIdLst>
         </p14:section>
-        <p14:section name="본문" id="{DDF8E3FD-5F02-4895-B53A-6A033532B804}">
+        <p14:section name="본문" id="{D549AE16-DD6C-47F8-BAED-111C7E65E762}">
           <p14:sldIdLst>
             <p14:sldId id="257"/>
             <p14:sldId id="258"/>
@@ -127,7 +127,7 @@
             <p14:sldId id="261"/>
           </p14:sldIdLst>
         </p14:section>
-        <p14:section name="마무리" id="{CD25D9B1-104F-4303-A125-D54C3C2B445F}">
+        <p14:section name="마무리" id="{0A147A5A-9CB0-41D6-9805-73F5B7364E62}">
           <p14:sldIdLst>
             <p14:sldId id="262"/>
           </p14:sldIdLst>
@@ -1655,7 +1655,7 @@
             </a:lvl1pPr>
           </a:lstStyle>
           <a:p>
-            <a:fld id="{7F17E42B-5FCF-42D9-B205-E4CD961D4FA3}" type="slidenum">
+            <a:fld id="{1AC4D47F-5502-4823-88AF-B6E4C4D3DA0F}" type="slidenum">
               <a:rPr lang="en-US"/>
               <a:t>‹#›</a:t>
             </a:fld>
@@ -2778,7 +2778,7 @@
             </a:lvl1pPr>
           </a:lstStyle>
           <a:p>
-            <a:fld id="{ADE0265E-349E-45D3-BD1B-2470459E2224}" type="slidenum">
+            <a:fld id="{32A79859-06E7-4EEF-8D51-505DBC583A7C}" type="slidenum">
               <a:rPr lang="en-US"/>
               <a:t>‹#›</a:t>
             </a:fld>
@@ -3785,7 +3785,7 @@
             </a:lvl1pPr>
           </a:lstStyle>
           <a:p>
-            <a:fld id="{F9B8E913-E01D-4314-B81E-1F32DF5F4A6F}" type="slidenum">
+            <a:fld id="{B3336537-4FBF-4F76-9C6E-0CFA2E6DEEDB}" type="slidenum">
               <a:rPr lang="en-US"/>
               <a:t>‹#›</a:t>
             </a:fld>
@@ -4948,7 +4948,7 @@
           <a:p>
             <a:r>
               <a:rPr lang="ko-KR"/>
-              <a:t>나 혼자 · 1인 가구 · 0000. 00. 00</a:t>
+              <a:t>나 혼자 · 1인 가구 · 날짜 입력</a:t>
             </a:r>
           </a:p>
         </p:txBody>
@@ -5237,7 +5237,7 @@
           <a:bodyPr/>
           <a:lstStyle/>
           <a:p>
-            <a:fld id="{69D67831-89E2-45F2-8BF9-62D026772843}" type="slidenum">
+            <a:fld id="{8BA190AC-C1AC-46A5-84E3-7227CCC001A1}" type="slidenum">
               <a:rPr lang="en-US"/>
               <a:t>‹#›</a:t>
             </a:fld>
@@ -5787,7 +5787,7 @@
           <a:bodyPr/>
           <a:lstStyle/>
           <a:p>
-            <a:fld id="{2D164AC5-1DBE-4E54-8E3D-4257A41E74DC}" type="slidenum">
+            <a:fld id="{F1039C69-FC18-4340-8662-FC60585064E8}" type="slidenum">
               <a:rPr lang="en-US"/>
               <a:t>‹#›</a:t>
             </a:fld>
@@ -6762,7 +6762,7 @@
           <a:bodyPr/>
           <a:lstStyle/>
           <a:p>
-            <a:fld id="{725F540C-E89F-44F1-B98A-512B8F285E68}" type="slidenum">
+            <a:fld id="{12B49D15-0161-4EA0-9CFD-9BF067E0BFC4}" type="slidenum">
               <a:rPr lang="en-US"/>
               <a:t>‹#›</a:t>
             </a:fld>
@@ -8020,7 +8020,7 @@
           <a:bodyPr/>
           <a:lstStyle/>
           <a:p>
-            <a:fld id="{7276428B-462A-43C1-BDEF-55C65F11219D}" type="slidenum">
+            <a:fld id="{22147DFA-8A05-48F1-877C-3C6EFD372DE5}" type="slidenum">
               <a:rPr lang="en-US"/>
               <a:t>‹#›</a:t>
             </a:fld>
@@ -8108,7 +8108,7 @@
           <a:bodyPr/>
           <a:lstStyle/>
           <a:p>
-            <a:fld id="{7A808711-8AF8-4F62-B2A3-99B132ECD2C5}" type="slidenum">
+            <a:fld id="{2FA2F320-DE6E-4E53-8588-0E8016C89745}" type="slidenum">
               <a:rPr lang="en-US"/>
               <a:t>‹#›</a:t>
             </a:fld>
